--- a/flyer/komunitas-project-deck.pptx
+++ b/flyer/komunitas-project-deck.pptx
@@ -3040,7 +3040,7 @@
         <p:spPr>
           <a:xfrm>
             <a:off x="731520" y="3977640"/>
-            <a:ext cx="10058400" cy="548640"/>
+            <a:ext cx="10515600" cy="548640"/>
           </a:xfrm>
           <a:prstGeom prst="rect">
             <a:avLst/>
@@ -3079,7 +3079,7 @@
         <p:spPr>
           <a:xfrm>
             <a:off x="731520" y="4572000"/>
-            <a:ext cx="9601200" cy="457200"/>
+            <a:ext cx="10058400" cy="457200"/>
           </a:xfrm>
           <a:prstGeom prst="rect">
             <a:avLst/>
@@ -4073,7 +4073,7 @@
         <p:spPr>
           <a:xfrm>
             <a:off x="640080" y="5029200"/>
-            <a:ext cx="6400800" cy="320040"/>
+            <a:ext cx="8229600" cy="320040"/>
           </a:xfrm>
           <a:prstGeom prst="rect">
             <a:avLst/>
@@ -4613,7 +4613,7 @@
         <p:spPr>
           <a:xfrm>
             <a:off x="8092440" y="5440680"/>
-            <a:ext cx="1463040" cy="411480"/>
+            <a:ext cx="1828800" cy="411480"/>
           </a:xfrm>
           <a:prstGeom prst="rect">
             <a:avLst/>
@@ -9347,7 +9347,7 @@
         <p:spPr>
           <a:xfrm>
             <a:off x="914400" y="2852928"/>
-            <a:ext cx="1508760" cy="365760"/>
+            <a:ext cx="1554480" cy="365760"/>
           </a:xfrm>
           <a:prstGeom prst="rect">
             <a:avLst/>
@@ -9529,7 +9529,7 @@
         <p:spPr>
           <a:xfrm>
             <a:off x="3154680" y="2852928"/>
-            <a:ext cx="1508760" cy="365760"/>
+            <a:ext cx="1554480" cy="365760"/>
           </a:xfrm>
           <a:prstGeom prst="rect">
             <a:avLst/>
@@ -9711,7 +9711,7 @@
         <p:spPr>
           <a:xfrm>
             <a:off x="5394960" y="2852928"/>
-            <a:ext cx="1508760" cy="365760"/>
+            <a:ext cx="1554480" cy="365760"/>
           </a:xfrm>
           <a:prstGeom prst="rect">
             <a:avLst/>
@@ -9893,7 +9893,7 @@
         <p:spPr>
           <a:xfrm>
             <a:off x="7635240" y="2852928"/>
-            <a:ext cx="1508760" cy="365760"/>
+            <a:ext cx="1554480" cy="365760"/>
           </a:xfrm>
           <a:prstGeom prst="rect">
             <a:avLst/>
@@ -10075,7 +10075,7 @@
         <p:spPr>
           <a:xfrm>
             <a:off x="9875520" y="2852928"/>
-            <a:ext cx="1508760" cy="365760"/>
+            <a:ext cx="1554480" cy="365760"/>
           </a:xfrm>
           <a:prstGeom prst="rect">
             <a:avLst/>
@@ -11413,7 +11413,7 @@
                 <a:ea typeface="Arial" pitchFamily="34" charset="-122"/>
                 <a:cs typeface="Arial" pitchFamily="34" charset="-120"/>
               </a:rPr>
-              <a:t>Cookie + local storage</a:t>
+              <a:t>Cookie &amp; browser</a:t>
             </a:r>
             <a:endParaRPr lang="en-US" sz="1200" dirty="0"/>
           </a:p>
@@ -13654,7 +13654,7 @@
         <p:spPr>
           <a:xfrm>
             <a:off x="1600200" y="1810512"/>
-            <a:ext cx="4297680" cy="365760"/>
+            <a:ext cx="4389120" cy="365760"/>
           </a:xfrm>
           <a:prstGeom prst="rect">
             <a:avLst/>
@@ -13693,7 +13693,7 @@
         <p:spPr>
           <a:xfrm>
             <a:off x="1600200" y="2194560"/>
-            <a:ext cx="4297680" cy="731520"/>
+            <a:ext cx="4389120" cy="731520"/>
           </a:xfrm>
           <a:prstGeom prst="rect">
             <a:avLst/>
@@ -13778,7 +13778,7 @@
         <p:spPr>
           <a:xfrm>
             <a:off x="7178040" y="1810512"/>
-            <a:ext cx="4297680" cy="365760"/>
+            <a:ext cx="4389120" cy="365760"/>
           </a:xfrm>
           <a:prstGeom prst="rect">
             <a:avLst/>
@@ -13817,7 +13817,7 @@
         <p:spPr>
           <a:xfrm>
             <a:off x="7178040" y="2194560"/>
-            <a:ext cx="4297680" cy="731520"/>
+            <a:ext cx="4389120" cy="731520"/>
           </a:xfrm>
           <a:prstGeom prst="rect">
             <a:avLst/>
@@ -13902,7 +13902,7 @@
         <p:spPr>
           <a:xfrm>
             <a:off x="1600200" y="3182112"/>
-            <a:ext cx="4297680" cy="365760"/>
+            <a:ext cx="4389120" cy="365760"/>
           </a:xfrm>
           <a:prstGeom prst="rect">
             <a:avLst/>
@@ -13941,7 +13941,7 @@
         <p:spPr>
           <a:xfrm>
             <a:off x="1600200" y="3566160"/>
-            <a:ext cx="4297680" cy="731520"/>
+            <a:ext cx="4389120" cy="731520"/>
           </a:xfrm>
           <a:prstGeom prst="rect">
             <a:avLst/>
@@ -14026,7 +14026,7 @@
         <p:spPr>
           <a:xfrm>
             <a:off x="7178040" y="3182112"/>
-            <a:ext cx="4297680" cy="365760"/>
+            <a:ext cx="4389120" cy="365760"/>
           </a:xfrm>
           <a:prstGeom prst="rect">
             <a:avLst/>
@@ -14065,7 +14065,7 @@
         <p:spPr>
           <a:xfrm>
             <a:off x="7178040" y="3566160"/>
-            <a:ext cx="4297680" cy="731520"/>
+            <a:ext cx="4389120" cy="731520"/>
           </a:xfrm>
           <a:prstGeom prst="rect">
             <a:avLst/>
@@ -14150,7 +14150,7 @@
         <p:spPr>
           <a:xfrm>
             <a:off x="1600200" y="4553712"/>
-            <a:ext cx="4297680" cy="365760"/>
+            <a:ext cx="4389120" cy="365760"/>
           </a:xfrm>
           <a:prstGeom prst="rect">
             <a:avLst/>
@@ -14189,7 +14189,7 @@
         <p:spPr>
           <a:xfrm>
             <a:off x="1600200" y="4937760"/>
-            <a:ext cx="4297680" cy="731520"/>
+            <a:ext cx="4389120" cy="731520"/>
           </a:xfrm>
           <a:prstGeom prst="rect">
             <a:avLst/>
@@ -14274,7 +14274,7 @@
         <p:spPr>
           <a:xfrm>
             <a:off x="7178040" y="4553712"/>
-            <a:ext cx="4297680" cy="365760"/>
+            <a:ext cx="4389120" cy="365760"/>
           </a:xfrm>
           <a:prstGeom prst="rect">
             <a:avLst/>
@@ -14313,7 +14313,7 @@
         <p:spPr>
           <a:xfrm>
             <a:off x="7178040" y="4937760"/>
-            <a:ext cx="4297680" cy="731520"/>
+            <a:ext cx="4389120" cy="731520"/>
           </a:xfrm>
           <a:prstGeom prst="rect">
             <a:avLst/>
@@ -19346,7 +19346,7 @@
         <p:spPr>
           <a:xfrm>
             <a:off x="1600200" y="1810512"/>
-            <a:ext cx="4754880" cy="365760"/>
+            <a:ext cx="4846320" cy="365760"/>
           </a:xfrm>
           <a:prstGeom prst="rect">
             <a:avLst/>
@@ -19385,7 +19385,7 @@
         <p:spPr>
           <a:xfrm>
             <a:off x="1600200" y="2212848"/>
-            <a:ext cx="4754880" cy="868680"/>
+            <a:ext cx="4846320" cy="868680"/>
           </a:xfrm>
           <a:prstGeom prst="rect">
             <a:avLst/>
@@ -19470,7 +19470,7 @@
         <p:spPr>
           <a:xfrm>
             <a:off x="1600200" y="3182112"/>
-            <a:ext cx="4754880" cy="365760"/>
+            <a:ext cx="4846320" cy="365760"/>
           </a:xfrm>
           <a:prstGeom prst="rect">
             <a:avLst/>
@@ -19509,7 +19509,7 @@
         <p:spPr>
           <a:xfrm>
             <a:off x="1600200" y="3584448"/>
-            <a:ext cx="4754880" cy="868680"/>
+            <a:ext cx="4846320" cy="868680"/>
           </a:xfrm>
           <a:prstGeom prst="rect">
             <a:avLst/>
@@ -19594,7 +19594,7 @@
         <p:spPr>
           <a:xfrm>
             <a:off x="1600200" y="4553712"/>
-            <a:ext cx="4754880" cy="365760"/>
+            <a:ext cx="4846320" cy="365760"/>
           </a:xfrm>
           <a:prstGeom prst="rect">
             <a:avLst/>
@@ -19633,7 +19633,7 @@
         <p:spPr>
           <a:xfrm>
             <a:off x="1600200" y="4956048"/>
-            <a:ext cx="4754880" cy="868680"/>
+            <a:ext cx="4846320" cy="868680"/>
           </a:xfrm>
           <a:prstGeom prst="rect">
             <a:avLst/>
@@ -20117,8 +20117,8 @@
         </p:nvSpPr>
         <p:spPr>
           <a:xfrm>
-            <a:off x="868680" y="3200400"/>
-            <a:ext cx="1554480" cy="457200"/>
+            <a:off x="868680" y="3108960"/>
+            <a:ext cx="1554480" cy="548640"/>
           </a:xfrm>
           <a:prstGeom prst="rect">
             <a:avLst/>
@@ -20134,7 +20134,7 @@
               <a:buNone/>
             </a:pPr>
             <a:r>
-              <a:rPr lang="en-US" sz="1800" b="1" dirty="0">
+              <a:rPr lang="en-US" sz="1700" b="1" dirty="0">
                 <a:solidFill>
                   <a:srgbClr val="292524"/>
                 </a:solidFill>
@@ -20144,7 +20144,7 @@
               </a:rPr>
               <a:t>Nearby first</a:t>
             </a:r>
-            <a:endParaRPr lang="en-US" sz="1800" dirty="0"/>
+            <a:endParaRPr lang="en-US" sz="1700" dirty="0"/>
           </a:p>
         </p:txBody>
       </p:sp>
@@ -20173,7 +20173,7 @@
               <a:buNone/>
             </a:pPr>
             <a:r>
-              <a:rPr lang="en-US" sz="1400" dirty="0">
+              <a:rPr lang="en-US" sz="1350" dirty="0">
                 <a:solidFill>
                   <a:srgbClr val="78716C"/>
                 </a:solidFill>
@@ -20183,7 +20183,7 @@
               </a:rPr>
               <a:t>The dashboard shows open activities within 20 km of you, matched to your hobbies.</a:t>
             </a:r>
-            <a:endParaRPr lang="en-US" sz="1400" dirty="0"/>
+            <a:endParaRPr lang="en-US" sz="1350" dirty="0"/>
           </a:p>
         </p:txBody>
       </p:sp>
@@ -20268,8 +20268,8 @@
         </p:nvSpPr>
         <p:spPr>
           <a:xfrm>
-            <a:off x="3086100" y="3200400"/>
-            <a:ext cx="1554480" cy="457200"/>
+            <a:off x="3086100" y="3108960"/>
+            <a:ext cx="1554480" cy="548640"/>
           </a:xfrm>
           <a:prstGeom prst="rect">
             <a:avLst/>
@@ -20285,7 +20285,7 @@
               <a:buNone/>
             </a:pPr>
             <a:r>
-              <a:rPr lang="en-US" sz="1800" b="1" dirty="0">
+              <a:rPr lang="en-US" sz="1700" b="1" dirty="0">
                 <a:solidFill>
                   <a:srgbClr val="292524"/>
                 </a:solidFill>
@@ -20295,7 +20295,7 @@
               </a:rPr>
               <a:t>Easy to join</a:t>
             </a:r>
-            <a:endParaRPr lang="en-US" sz="1800" dirty="0"/>
+            <a:endParaRPr lang="en-US" sz="1700" dirty="0"/>
           </a:p>
         </p:txBody>
       </p:sp>
@@ -20324,7 +20324,7 @@
               <a:buNone/>
             </a:pPr>
             <a:r>
-              <a:rPr lang="en-US" sz="1400" dirty="0">
+              <a:rPr lang="en-US" sz="1350" dirty="0">
                 <a:solidFill>
                   <a:srgbClr val="78716C"/>
                 </a:solidFill>
@@ -20334,7 +20334,7 @@
               </a:rPr>
               <a:t>Join open activities instantly, or request a spot when the organizer approves joiners.</a:t>
             </a:r>
-            <a:endParaRPr lang="en-US" sz="1400" dirty="0"/>
+            <a:endParaRPr lang="en-US" sz="1350" dirty="0"/>
           </a:p>
         </p:txBody>
       </p:sp>
@@ -20419,8 +20419,8 @@
         </p:nvSpPr>
         <p:spPr>
           <a:xfrm>
-            <a:off x="5303520" y="3200400"/>
-            <a:ext cx="1554480" cy="457200"/>
+            <a:off x="5303520" y="3108960"/>
+            <a:ext cx="1554480" cy="548640"/>
           </a:xfrm>
           <a:prstGeom prst="rect">
             <a:avLst/>
@@ -20436,7 +20436,7 @@
               <a:buNone/>
             </a:pPr>
             <a:r>
-              <a:rPr lang="en-US" sz="1800" b="1" dirty="0">
+              <a:rPr lang="en-US" sz="1700" b="1" dirty="0">
                 <a:solidFill>
                   <a:srgbClr val="292524"/>
                 </a:solidFill>
@@ -20446,7 +20446,7 @@
               </a:rPr>
               <a:t>Easy to share</a:t>
             </a:r>
-            <a:endParaRPr lang="en-US" sz="1800" dirty="0"/>
+            <a:endParaRPr lang="en-US" sz="1700" dirty="0"/>
           </a:p>
         </p:txBody>
       </p:sp>
@@ -20475,7 +20475,7 @@
               <a:buNone/>
             </a:pPr>
             <a:r>
-              <a:rPr lang="en-US" sz="1400" dirty="0">
+              <a:rPr lang="en-US" sz="1350" dirty="0">
                 <a:solidFill>
                   <a:srgbClr val="78716C"/>
                 </a:solidFill>
@@ -20485,7 +20485,7 @@
               </a:rPr>
               <a:t>Invite link, WhatsApp, QR code and a ready-made flyer for every activity.</a:t>
             </a:r>
-            <a:endParaRPr lang="en-US" sz="1400" dirty="0"/>
+            <a:endParaRPr lang="en-US" sz="1350" dirty="0"/>
           </a:p>
         </p:txBody>
       </p:sp>
@@ -20570,8 +20570,8 @@
         </p:nvSpPr>
         <p:spPr>
           <a:xfrm>
-            <a:off x="7520940" y="3200400"/>
-            <a:ext cx="1554480" cy="457200"/>
+            <a:off x="7520940" y="3108960"/>
+            <a:ext cx="1554480" cy="548640"/>
           </a:xfrm>
           <a:prstGeom prst="rect">
             <a:avLst/>
@@ -20587,7 +20587,7 @@
               <a:buNone/>
             </a:pPr>
             <a:r>
-              <a:rPr lang="en-US" sz="1800" b="1" dirty="0">
+              <a:rPr lang="en-US" sz="1700" b="1" dirty="0">
                 <a:solidFill>
                   <a:srgbClr val="292524"/>
                 </a:solidFill>
@@ -20597,7 +20597,7 @@
               </a:rPr>
               <a:t>GPS stored</a:t>
             </a:r>
-            <a:endParaRPr lang="en-US" sz="1800" dirty="0"/>
+            <a:endParaRPr lang="en-US" sz="1700" dirty="0"/>
           </a:p>
         </p:txBody>
       </p:sp>
@@ -20626,7 +20626,7 @@
               <a:buNone/>
             </a:pPr>
             <a:r>
-              <a:rPr lang="en-US" sz="1400" dirty="0">
+              <a:rPr lang="en-US" sz="1350" dirty="0">
                 <a:solidFill>
                   <a:srgbClr val="78716C"/>
                 </a:solidFill>
@@ -20636,7 +20636,7 @@
               </a:rPr>
               <a:t>Your live location is used in the moment only and never saved to the database.</a:t>
             </a:r>
-            <a:endParaRPr lang="en-US" sz="1400" dirty="0"/>
+            <a:endParaRPr lang="en-US" sz="1350" dirty="0"/>
           </a:p>
         </p:txBody>
       </p:sp>
@@ -20721,8 +20721,8 @@
         </p:nvSpPr>
         <p:spPr>
           <a:xfrm>
-            <a:off x="9738360" y="3200400"/>
-            <a:ext cx="1554480" cy="457200"/>
+            <a:off x="9738360" y="3108960"/>
+            <a:ext cx="1554480" cy="548640"/>
           </a:xfrm>
           <a:prstGeom prst="rect">
             <a:avLst/>
@@ -20738,7 +20738,7 @@
               <a:buNone/>
             </a:pPr>
             <a:r>
-              <a:rPr lang="en-US" sz="1800" b="1" dirty="0">
+              <a:rPr lang="en-US" sz="1700" b="1" dirty="0">
                 <a:solidFill>
                   <a:srgbClr val="292524"/>
                 </a:solidFill>
@@ -20748,7 +20748,7 @@
               </a:rPr>
               <a:t>Bilingual</a:t>
             </a:r>
-            <a:endParaRPr lang="en-US" sz="1800" dirty="0"/>
+            <a:endParaRPr lang="en-US" sz="1700" dirty="0"/>
           </a:p>
         </p:txBody>
       </p:sp>
@@ -20777,7 +20777,7 @@
               <a:buNone/>
             </a:pPr>
             <a:r>
-              <a:rPr lang="en-US" sz="1400" dirty="0">
+              <a:rPr lang="en-US" sz="1350" dirty="0">
                 <a:solidFill>
                   <a:srgbClr val="78716C"/>
                 </a:solidFill>
@@ -20787,7 +20787,7 @@
               </a:rPr>
               <a:t>Every screen in English and Bahasa Indonesia, switchable at any time.</a:t>
             </a:r>
-            <a:endParaRPr lang="en-US" sz="1400" dirty="0"/>
+            <a:endParaRPr lang="en-US" sz="1350" dirty="0"/>
           </a:p>
         </p:txBody>
       </p:sp>
@@ -22014,7 +22014,7 @@
         <p:spPr>
           <a:xfrm>
             <a:off x="914400" y="3154680"/>
-            <a:ext cx="1463040" cy="457200"/>
+            <a:ext cx="1600200" cy="457200"/>
           </a:xfrm>
           <a:prstGeom prst="rect">
             <a:avLst/>
@@ -22030,7 +22030,7 @@
               <a:buNone/>
             </a:pPr>
             <a:r>
-              <a:rPr lang="en-US" sz="1800" b="1" dirty="0">
+              <a:rPr lang="en-US" sz="1600" b="1" dirty="0">
                 <a:solidFill>
                   <a:srgbClr val="292524"/>
                 </a:solidFill>
@@ -22040,7 +22040,7 @@
               </a:rPr>
               <a:t>Participant</a:t>
             </a:r>
-            <a:endParaRPr lang="en-US" sz="1800" dirty="0"/>
+            <a:endParaRPr lang="en-US" sz="1600" dirty="0"/>
           </a:p>
         </p:txBody>
       </p:sp>
@@ -22053,7 +22053,7 @@
         <p:spPr>
           <a:xfrm>
             <a:off x="914400" y="3657600"/>
-            <a:ext cx="1463040" cy="2011680"/>
+            <a:ext cx="1508760" cy="2011680"/>
           </a:xfrm>
           <a:prstGeom prst="rect">
             <a:avLst/>
@@ -22172,7 +22172,7 @@
         <p:spPr>
           <a:xfrm>
             <a:off x="3131820" y="3154680"/>
-            <a:ext cx="1463040" cy="457200"/>
+            <a:ext cx="1600200" cy="457200"/>
           </a:xfrm>
           <a:prstGeom prst="rect">
             <a:avLst/>
@@ -22188,7 +22188,7 @@
               <a:buNone/>
             </a:pPr>
             <a:r>
-              <a:rPr lang="en-US" sz="1800" b="1" dirty="0">
+              <a:rPr lang="en-US" sz="1600" b="1" dirty="0">
                 <a:solidFill>
                   <a:srgbClr val="292524"/>
                 </a:solidFill>
@@ -22198,7 +22198,7 @@
               </a:rPr>
               <a:t>Organizer</a:t>
             </a:r>
-            <a:endParaRPr lang="en-US" sz="1800" dirty="0"/>
+            <a:endParaRPr lang="en-US" sz="1600" dirty="0"/>
           </a:p>
         </p:txBody>
       </p:sp>
@@ -22211,7 +22211,7 @@
         <p:spPr>
           <a:xfrm>
             <a:off x="3131820" y="3657600"/>
-            <a:ext cx="1463040" cy="2011680"/>
+            <a:ext cx="1508760" cy="2011680"/>
           </a:xfrm>
           <a:prstGeom prst="rect">
             <a:avLst/>
@@ -22330,7 +22330,7 @@
         <p:spPr>
           <a:xfrm>
             <a:off x="5349240" y="3154680"/>
-            <a:ext cx="1463040" cy="457200"/>
+            <a:ext cx="1600200" cy="457200"/>
           </a:xfrm>
           <a:prstGeom prst="rect">
             <a:avLst/>
@@ -22346,7 +22346,7 @@
               <a:buNone/>
             </a:pPr>
             <a:r>
-              <a:rPr lang="en-US" sz="1800" b="1" dirty="0">
+              <a:rPr lang="en-US" sz="1600" b="1" dirty="0">
                 <a:solidFill>
                   <a:srgbClr val="292524"/>
                 </a:solidFill>
@@ -22356,7 +22356,7 @@
               </a:rPr>
               <a:t>Moderator</a:t>
             </a:r>
-            <a:endParaRPr lang="en-US" sz="1800" dirty="0"/>
+            <a:endParaRPr lang="en-US" sz="1600" dirty="0"/>
           </a:p>
         </p:txBody>
       </p:sp>
@@ -22369,7 +22369,7 @@
         <p:spPr>
           <a:xfrm>
             <a:off x="5349240" y="3657600"/>
-            <a:ext cx="1463040" cy="2011680"/>
+            <a:ext cx="1508760" cy="2011680"/>
           </a:xfrm>
           <a:prstGeom prst="rect">
             <a:avLst/>
@@ -22488,7 +22488,7 @@
         <p:spPr>
           <a:xfrm>
             <a:off x="7566660" y="3154680"/>
-            <a:ext cx="1463040" cy="457200"/>
+            <a:ext cx="1600200" cy="457200"/>
           </a:xfrm>
           <a:prstGeom prst="rect">
             <a:avLst/>
@@ -22504,7 +22504,7 @@
               <a:buNone/>
             </a:pPr>
             <a:r>
-              <a:rPr lang="en-US" sz="1800" b="1" dirty="0">
+              <a:rPr lang="en-US" sz="1600" b="1" dirty="0">
                 <a:solidFill>
                   <a:srgbClr val="292524"/>
                 </a:solidFill>
@@ -22514,7 +22514,7 @@
               </a:rPr>
               <a:t>Admin</a:t>
             </a:r>
-            <a:endParaRPr lang="en-US" sz="1800" dirty="0"/>
+            <a:endParaRPr lang="en-US" sz="1600" dirty="0"/>
           </a:p>
         </p:txBody>
       </p:sp>
@@ -22527,7 +22527,7 @@
         <p:spPr>
           <a:xfrm>
             <a:off x="7566660" y="3657600"/>
-            <a:ext cx="1463040" cy="2011680"/>
+            <a:ext cx="1508760" cy="2011680"/>
           </a:xfrm>
           <a:prstGeom prst="rect">
             <a:avLst/>
@@ -22646,7 +22646,7 @@
         <p:spPr>
           <a:xfrm>
             <a:off x="9784080" y="3154680"/>
-            <a:ext cx="1463040" cy="457200"/>
+            <a:ext cx="1600200" cy="457200"/>
           </a:xfrm>
           <a:prstGeom prst="rect">
             <a:avLst/>
@@ -22662,7 +22662,7 @@
               <a:buNone/>
             </a:pPr>
             <a:r>
-              <a:rPr lang="en-US" sz="1800" b="1" dirty="0">
+              <a:rPr lang="en-US" sz="1600" b="1" dirty="0">
                 <a:solidFill>
                   <a:srgbClr val="292524"/>
                 </a:solidFill>
@@ -22672,7 +22672,7 @@
               </a:rPr>
               <a:t>Super admin</a:t>
             </a:r>
-            <a:endParaRPr lang="en-US" sz="1800" dirty="0"/>
+            <a:endParaRPr lang="en-US" sz="1600" dirty="0"/>
           </a:p>
         </p:txBody>
       </p:sp>
@@ -22685,7 +22685,7 @@
         <p:spPr>
           <a:xfrm>
             <a:off x="9784080" y="3657600"/>
-            <a:ext cx="1463040" cy="2011680"/>
+            <a:ext cx="1508760" cy="2011680"/>
           </a:xfrm>
           <a:prstGeom prst="rect">
             <a:avLst/>
@@ -23055,7 +23055,7 @@
         <p:spPr>
           <a:xfrm>
             <a:off x="914400" y="3154680"/>
-            <a:ext cx="1417320" cy="411480"/>
+            <a:ext cx="1508760" cy="411480"/>
           </a:xfrm>
           <a:prstGeom prst="rect">
             <a:avLst/>
@@ -23094,7 +23094,7 @@
         <p:spPr>
           <a:xfrm>
             <a:off x="914400" y="3657600"/>
-            <a:ext cx="1417320" cy="1600200"/>
+            <a:ext cx="1463040" cy="1600200"/>
           </a:xfrm>
           <a:prstGeom prst="rect">
             <a:avLst/>
@@ -23276,7 +23276,7 @@
         <p:spPr>
           <a:xfrm>
             <a:off x="3154680" y="3154680"/>
-            <a:ext cx="1417320" cy="411480"/>
+            <a:ext cx="1508760" cy="411480"/>
           </a:xfrm>
           <a:prstGeom prst="rect">
             <a:avLst/>
@@ -23315,7 +23315,7 @@
         <p:spPr>
           <a:xfrm>
             <a:off x="3154680" y="3657600"/>
-            <a:ext cx="1417320" cy="1600200"/>
+            <a:ext cx="1463040" cy="1600200"/>
           </a:xfrm>
           <a:prstGeom prst="rect">
             <a:avLst/>
@@ -23497,7 +23497,7 @@
         <p:spPr>
           <a:xfrm>
             <a:off x="5394960" y="3154680"/>
-            <a:ext cx="1417320" cy="411480"/>
+            <a:ext cx="1508760" cy="411480"/>
           </a:xfrm>
           <a:prstGeom prst="rect">
             <a:avLst/>
@@ -23536,7 +23536,7 @@
         <p:spPr>
           <a:xfrm>
             <a:off x="5394960" y="3657600"/>
-            <a:ext cx="1417320" cy="1600200"/>
+            <a:ext cx="1463040" cy="1600200"/>
           </a:xfrm>
           <a:prstGeom prst="rect">
             <a:avLst/>
@@ -23718,7 +23718,7 @@
         <p:spPr>
           <a:xfrm>
             <a:off x="7635240" y="3154680"/>
-            <a:ext cx="1417320" cy="411480"/>
+            <a:ext cx="1508760" cy="411480"/>
           </a:xfrm>
           <a:prstGeom prst="rect">
             <a:avLst/>
@@ -23757,7 +23757,7 @@
         <p:spPr>
           <a:xfrm>
             <a:off x="7635240" y="3657600"/>
-            <a:ext cx="1417320" cy="1600200"/>
+            <a:ext cx="1463040" cy="1600200"/>
           </a:xfrm>
           <a:prstGeom prst="rect">
             <a:avLst/>
@@ -23939,7 +23939,7 @@
         <p:spPr>
           <a:xfrm>
             <a:off x="9875520" y="3154680"/>
-            <a:ext cx="1417320" cy="411480"/>
+            <a:ext cx="1508760" cy="411480"/>
           </a:xfrm>
           <a:prstGeom prst="rect">
             <a:avLst/>
@@ -23978,7 +23978,7 @@
         <p:spPr>
           <a:xfrm>
             <a:off x="9875520" y="3657600"/>
-            <a:ext cx="1417320" cy="1600200"/>
+            <a:ext cx="1463040" cy="1600200"/>
           </a:xfrm>
           <a:prstGeom prst="rect">
             <a:avLst/>

--- a/flyer/komunitas-project-deck.pptx
+++ b/flyer/komunitas-project-deck.pptx
@@ -701,7 +701,7 @@
           <a:p>
             <a:r>
               <a:rPr lang="en-US" dirty="0"/>
-              <a:t>Here's everything in the app on one slide: the nearby dashboard, explore and search, my activities, sharing, comments, private messages, community profiles and friends, notifications, and help and support tickets.</a:t>
+              <a:t>Here's everything in the app on one slide: the nearby dashboard, explore and search, my activities with check-in and ratings, sharing, comments, private messages, community profiles, friends and groups, notifications by email and phone push, and help and support tickets.</a:t>
             </a:r>
             <a:endParaRPr lang="en-US" dirty="0"/>
           </a:p>
@@ -1229,7 +1229,7 @@
           <a:p>
             <a:r>
               <a:rPr lang="en-US" dirty="0"/>
-              <a:t>Data lives in five places. The main one is the Supabase Postgres database with 31 tables, all protected by row-level security. Supabase Auth holds accounts and sessions. Supabase Storage holds banner images and complaint attachments. The user's own device keeps their language and location preference; live GPS never leaves it. And Vercel holds the few server secrets.</a:t>
+              <a:t>Data lives in five places. The main one is the Supabase Postgres database with 41 tables, all protected by row-level security. Supabase Auth holds accounts and sessions. Supabase Storage holds banner images and complaint attachments. The user's own device keeps their language and location preference; live GPS never leaves it. And Vercel holds the few server secrets.</a:t>
             </a:r>
             <a:endParaRPr lang="en-US" dirty="0"/>
           </a:p>
@@ -1317,7 +1317,7 @@
           <a:p>
             <a:r>
               <a:rPr lang="en-US" dirty="0"/>
-              <a:t>The 31 tables fall into five groups: people and their settings, activities and participation, private messaging, support and notifications, and admin and safety records such as the audit log. Views like my_profile expose only what each user is allowed to see.</a:t>
+              <a:t>The 41 tables fall into five groups: people and their settings, activities with participation, waiting lists, check-in and ratings, groups and private messaging, support and notifications, and admin and safety records such as the audit log. Views like my_profile expose only what each user is allowed to see.</a:t>
             </a:r>
             <a:endParaRPr lang="en-US" dirty="0"/>
           </a:p>
@@ -1405,7 +1405,7 @@
           <a:p>
             <a:r>
               <a:rPr lang="en-US" dirty="0"/>
-              <a:t>Security is enforced in the database. Every table has row-level security, and over 150 SQL functions check the caller's role. GPS is never stored. PINs are hashed with bcrypt and lock after repeated failures. Other members can't read private profile fields. Admin actions are written to an audit log, and members can report, block and file complaints.</a:t>
+              <a:t>Security is enforced in the database. Every table has row-level security, and over 190 SQL functions check the caller's role. GPS is never stored. PINs are hashed with bcrypt and lock after repeated failures. Other members can't read private profile fields. Admin actions are written to an audit log, and members can report, block and file complaints.</a:t>
             </a:r>
             <a:endParaRPr lang="en-US" dirty="0"/>
           </a:p>
@@ -1669,7 +1669,7 @@
           <a:p>
             <a:r>
               <a:rPr lang="en-US" dirty="0"/>
-              <a:t>By the numbers: 45 screens, 51 shared components, about 19,400 lines of TypeScript and 4,600 lines of SQL, 31 database tables all protected by row-level security, and more than 1,400 interface strings in both English and Indonesian.</a:t>
+              <a:t>By the numbers: 52 screens, 74 shared components, about 25,600 lines of TypeScript with 43 unit tests, 5,900 lines of SQL across 26 migrations, 41 database tables all protected by row-level security, and more than 1,700 interface strings in both English and Indonesian.</a:t>
             </a:r>
             <a:endParaRPr lang="en-US" dirty="0"/>
           </a:p>
@@ -1757,7 +1757,7 @@
           <a:p>
             <a:r>
               <a:rPr lang="en-US" dirty="0"/>
-              <a:t>The most recent changes: banners of any shape now display in full, organizers and admins can generate flyers in three sizes, event creation was fixed with a small database migration, and the framework was upgraded for security.</a:t>
+              <a:t>The newest features: full activities keep a waiting list that moves up automatically, and people get alerts for new activities that match their hobbies. Organizers can check people in with a QR code, and attendees rate the activity afterwards. Reminders and rating prompts go out by email and phone push. And organizers get time-savers: duplicate, edit a whole weekly series, CSV export and a big-screen QR so a room can join live. Scan this code to try it now.</a:t>
             </a:r>
             <a:endParaRPr lang="en-US" dirty="0"/>
           </a:p>
@@ -1845,7 +1845,7 @@
           <a:p>
             <a:r>
               <a:rPr lang="en-US" dirty="0"/>
-              <a:t>We're open about what's left: a stronger second sign-in factor, scheduled reports, hiding organizer phone numbers at the database level, full account deletion, larger exports, and cleaning up the remaining lint warnings.</a:t>
+              <a:t>We're open about what's left: a stronger second sign-in factor, scheduled admin reports, in-app payments, full account deletion, larger exports, and a group chat and photo albums per activity.</a:t>
             </a:r>
             <a:endParaRPr lang="en-US" dirty="0"/>
           </a:p>
@@ -5323,7 +5323,7 @@
                 <a:ea typeface="Arial" pitchFamily="34" charset="-122"/>
                 <a:cs typeface="Arial" pitchFamily="34" charset="-120"/>
               </a:rPr>
-              <a:t>What you organize and what you've joined</a:t>
+              <a:t>What you organize and join, with check-in and ratings</a:t>
             </a:r>
             <a:endParaRPr lang="en-US" sz="1250" dirty="0"/>
           </a:p>
@@ -5955,7 +5955,7 @@
                 <a:ea typeface="Arial" pitchFamily="34" charset="-122"/>
                 <a:cs typeface="Arial" pitchFamily="34" charset="-120"/>
               </a:rPr>
-              <a:t>Public profiles, usernames, friends, social links</a:t>
+              <a:t>Profiles, friends, groups, and which friends are going</a:t>
             </a:r>
             <a:endParaRPr lang="en-US" sz="1250" dirty="0"/>
           </a:p>
@@ -6113,7 +6113,7 @@
                 <a:ea typeface="Arial" pitchFamily="34" charset="-122"/>
                 <a:cs typeface="Arial" pitchFamily="34" charset="-120"/>
               </a:rPr>
-              <a:t>Approvals, replies and updates, with preferences</a:t>
+              <a:t>Reminders, alerts and approvals, by email and push</a:t>
             </a:r>
             <a:endParaRPr lang="en-US" sz="1250" dirty="0"/>
           </a:p>
@@ -10822,7 +10822,7 @@
                 <a:ea typeface="Arial" pitchFamily="34" charset="-122"/>
                 <a:cs typeface="Arial" pitchFamily="34" charset="-120"/>
               </a:rPr>
-              <a:t>31 tables · 2 views</a:t>
+              <a:t>41 tables · 2 views</a:t>
             </a:r>
             <a:endParaRPr lang="en-US" sz="1200" dirty="0"/>
           </a:p>
@@ -11649,7 +11649,7 @@
                 <a:ea typeface="Arial" pitchFamily="34" charset="-122"/>
                 <a:cs typeface="Arial" pitchFamily="34" charset="-120"/>
               </a:rPr>
-              <a:t>Service-role key and SMTP password. Server-only, never sent to browsers or committed.</a:t>
+              <a:t>Service-role key, SMTP password and the push-notification key. Server-only, never sent to browsers or committed.</a:t>
             </a:r>
             <a:endParaRPr lang="en-US" sz="1200" dirty="0"/>
           </a:p>
@@ -11759,7 +11759,7 @@
                 <a:ea typeface="Arial" pitchFamily="34" charset="-122"/>
                 <a:cs typeface="Arial" pitchFamily="34" charset="-120"/>
               </a:rPr>
-              <a:t>31 tables in five groups</a:t>
+              <a:t>41 tables in five groups</a:t>
             </a:r>
             <a:endParaRPr lang="en-US" sz="3400" dirty="0"/>
           </a:p>
@@ -12399,7 +12399,7 @@
                 <a:ea typeface="Arial" pitchFamily="34" charset="-122"/>
                 <a:cs typeface="Arial" pitchFamily="34" charset="-120"/>
               </a:rPr>
-              <a:t>5 tables</a:t>
+              <a:t>9 tables</a:t>
             </a:r>
             <a:endParaRPr lang="en-US" sz="1150" dirty="0"/>
           </a:p>
@@ -12482,6 +12482,86 @@
                 <a:cs typeface="Arial" pitchFamily="34" charset="-120"/>
               </a:rPr>
               <a:t>event_participants</a:t>
+            </a:r>
+            <a:endParaRPr lang="en-US" sz="1050" dirty="0"/>
+          </a:p>
+          <a:p>
+            <a:pPr indent="0" marL="0">
+              <a:spcAft>
+                <a:spcPts val="300"/>
+              </a:spcAft>
+              <a:buNone/>
+            </a:pPr>
+            <a:r>
+              <a:rPr lang="en-US" sz="1050" dirty="0">
+                <a:solidFill>
+                  <a:srgbClr val="44403C"/>
+                </a:solidFill>
+                <a:latin typeface="Arial" pitchFamily="34" charset="0"/>
+                <a:ea typeface="Arial" pitchFamily="34" charset="-122"/>
+                <a:cs typeface="Arial" pitchFamily="34" charset="-120"/>
+              </a:rPr>
+              <a:t>event_contacts</a:t>
+            </a:r>
+            <a:endParaRPr lang="en-US" sz="1050" dirty="0"/>
+          </a:p>
+          <a:p>
+            <a:pPr indent="0" marL="0">
+              <a:spcAft>
+                <a:spcPts val="300"/>
+              </a:spcAft>
+              <a:buNone/>
+            </a:pPr>
+            <a:r>
+              <a:rPr lang="en-US" sz="1050" dirty="0">
+                <a:solidFill>
+                  <a:srgbClr val="44403C"/>
+                </a:solidFill>
+                <a:latin typeface="Arial" pitchFamily="34" charset="0"/>
+                <a:ea typeface="Arial" pitchFamily="34" charset="-122"/>
+                <a:cs typeface="Arial" pitchFamily="34" charset="-120"/>
+              </a:rPr>
+              <a:t>event_waitlist</a:t>
+            </a:r>
+            <a:endParaRPr lang="en-US" sz="1050" dirty="0"/>
+          </a:p>
+          <a:p>
+            <a:pPr indent="0" marL="0">
+              <a:spcAft>
+                <a:spcPts val="300"/>
+              </a:spcAft>
+              <a:buNone/>
+            </a:pPr>
+            <a:r>
+              <a:rPr lang="en-US" sz="1050" dirty="0">
+                <a:solidFill>
+                  <a:srgbClr val="44403C"/>
+                </a:solidFill>
+                <a:latin typeface="Arial" pitchFamily="34" charset="0"/>
+                <a:ea typeface="Arial" pitchFamily="34" charset="-122"/>
+                <a:cs typeface="Arial" pitchFamily="34" charset="-120"/>
+              </a:rPr>
+              <a:t>event_checkin_codes</a:t>
+            </a:r>
+            <a:endParaRPr lang="en-US" sz="1050" dirty="0"/>
+          </a:p>
+          <a:p>
+            <a:pPr indent="0" marL="0">
+              <a:spcAft>
+                <a:spcPts val="300"/>
+              </a:spcAft>
+              <a:buNone/>
+            </a:pPr>
+            <a:r>
+              <a:rPr lang="en-US" sz="1050" dirty="0">
+                <a:solidFill>
+                  <a:srgbClr val="44403C"/>
+                </a:solidFill>
+                <a:latin typeface="Arial" pitchFamily="34" charset="0"/>
+                <a:ea typeface="Arial" pitchFamily="34" charset="-122"/>
+                <a:cs typeface="Arial" pitchFamily="34" charset="-120"/>
+              </a:rPr>
+              <a:t>event_ratings</a:t>
             </a:r>
             <a:endParaRPr lang="en-US" sz="1050" dirty="0"/>
           </a:p>
@@ -12640,7 +12720,7 @@
                 <a:ea typeface="Arial" pitchFamily="34" charset="-122"/>
                 <a:cs typeface="Arial" pitchFamily="34" charset="-120"/>
               </a:rPr>
-              <a:t>Messaging</a:t>
+              <a:t>Groups &amp; chat</a:t>
             </a:r>
             <a:endParaRPr lang="en-US" sz="1500" dirty="0"/>
           </a:p>
@@ -12679,7 +12759,7 @@
                 <a:ea typeface="Arial" pitchFamily="34" charset="-122"/>
                 <a:cs typeface="Arial" pitchFamily="34" charset="-120"/>
               </a:rPr>
-              <a:t>4 tables</a:t>
+              <a:t>8 tables</a:t>
             </a:r>
             <a:endParaRPr lang="en-US" sz="1150" dirty="0"/>
           </a:p>
@@ -12705,6 +12785,86 @@
         <p:txBody>
           <a:bodyPr wrap="square" lIns="0" tIns="0" rIns="0" bIns="0" rtlCol="0" anchor="t"/>
           <a:lstStyle/>
+          <a:p>
+            <a:pPr indent="0" marL="0">
+              <a:spcAft>
+                <a:spcPts val="300"/>
+              </a:spcAft>
+              <a:buNone/>
+            </a:pPr>
+            <a:r>
+              <a:rPr lang="en-US" sz="1050" dirty="0">
+                <a:solidFill>
+                  <a:srgbClr val="44403C"/>
+                </a:solidFill>
+                <a:latin typeface="Arial" pitchFamily="34" charset="0"/>
+                <a:ea typeface="Arial" pitchFamily="34" charset="-122"/>
+                <a:cs typeface="Arial" pitchFamily="34" charset="-120"/>
+              </a:rPr>
+              <a:t>groups</a:t>
+            </a:r>
+            <a:endParaRPr lang="en-US" sz="1050" dirty="0"/>
+          </a:p>
+          <a:p>
+            <a:pPr indent="0" marL="0">
+              <a:spcAft>
+                <a:spcPts val="300"/>
+              </a:spcAft>
+              <a:buNone/>
+            </a:pPr>
+            <a:r>
+              <a:rPr lang="en-US" sz="1050" dirty="0">
+                <a:solidFill>
+                  <a:srgbClr val="44403C"/>
+                </a:solidFill>
+                <a:latin typeface="Arial" pitchFamily="34" charset="0"/>
+                <a:ea typeface="Arial" pitchFamily="34" charset="-122"/>
+                <a:cs typeface="Arial" pitchFamily="34" charset="-120"/>
+              </a:rPr>
+              <a:t>group_members</a:t>
+            </a:r>
+            <a:endParaRPr lang="en-US" sz="1050" dirty="0"/>
+          </a:p>
+          <a:p>
+            <a:pPr indent="0" marL="0">
+              <a:spcAft>
+                <a:spcPts val="300"/>
+              </a:spcAft>
+              <a:buNone/>
+            </a:pPr>
+            <a:r>
+              <a:rPr lang="en-US" sz="1050" dirty="0">
+                <a:solidFill>
+                  <a:srgbClr val="44403C"/>
+                </a:solidFill>
+                <a:latin typeface="Arial" pitchFamily="34" charset="0"/>
+                <a:ea typeface="Arial" pitchFamily="34" charset="-122"/>
+                <a:cs typeface="Arial" pitchFamily="34" charset="-120"/>
+              </a:rPr>
+              <a:t>play_requests</a:t>
+            </a:r>
+            <a:endParaRPr lang="en-US" sz="1050" dirty="0"/>
+          </a:p>
+          <a:p>
+            <a:pPr indent="0" marL="0">
+              <a:spcAft>
+                <a:spcPts val="300"/>
+              </a:spcAft>
+              <a:buNone/>
+            </a:pPr>
+            <a:r>
+              <a:rPr lang="en-US" sz="1050" dirty="0">
+                <a:solidFill>
+                  <a:srgbClr val="44403C"/>
+                </a:solidFill>
+                <a:latin typeface="Arial" pitchFamily="34" charset="0"/>
+                <a:ea typeface="Arial" pitchFamily="34" charset="-122"/>
+                <a:cs typeface="Arial" pitchFamily="34" charset="-120"/>
+              </a:rPr>
+              <a:t>play_request_interests</a:t>
+            </a:r>
+            <a:endParaRPr lang="en-US" sz="1050" dirty="0"/>
+          </a:p>
           <a:p>
             <a:pPr indent="0" marL="0">
               <a:spcAft>
@@ -12939,7 +13099,7 @@
                 <a:ea typeface="Arial" pitchFamily="34" charset="-122"/>
                 <a:cs typeface="Arial" pitchFamily="34" charset="-120"/>
               </a:rPr>
-              <a:t>6 tables</a:t>
+              <a:t>8 tables</a:t>
             </a:r>
             <a:endParaRPr lang="en-US" sz="1150" dirty="0"/>
           </a:p>
@@ -13082,6 +13242,46 @@
                 <a:cs typeface="Arial" pitchFamily="34" charset="-120"/>
               </a:rPr>
               <a:t>notification_prefs</a:t>
+            </a:r>
+            <a:endParaRPr lang="en-US" sz="1050" dirty="0"/>
+          </a:p>
+          <a:p>
+            <a:pPr indent="0" marL="0">
+              <a:spcAft>
+                <a:spcPts val="300"/>
+              </a:spcAft>
+              <a:buNone/>
+            </a:pPr>
+            <a:r>
+              <a:rPr lang="en-US" sz="1050" dirty="0">
+                <a:solidFill>
+                  <a:srgbClr val="44403C"/>
+                </a:solidFill>
+                <a:latin typeface="Arial" pitchFamily="34" charset="0"/>
+                <a:ea typeface="Arial" pitchFamily="34" charset="-122"/>
+                <a:cs typeface="Arial" pitchFamily="34" charset="-120"/>
+              </a:rPr>
+              <a:t>push_subscriptions</a:t>
+            </a:r>
+            <a:endParaRPr lang="en-US" sz="1050" dirty="0"/>
+          </a:p>
+          <a:p>
+            <a:pPr indent="0" marL="0">
+              <a:spcAft>
+                <a:spcPts val="300"/>
+              </a:spcAft>
+              <a:buNone/>
+            </a:pPr>
+            <a:r>
+              <a:rPr lang="en-US" sz="1050" dirty="0">
+                <a:solidFill>
+                  <a:srgbClr val="44403C"/>
+                </a:solidFill>
+                <a:latin typeface="Arial" pitchFamily="34" charset="0"/>
+                <a:ea typeface="Arial" pitchFamily="34" charset="-122"/>
+                <a:cs typeface="Arial" pitchFamily="34" charset="-120"/>
+              </a:rPr>
+              <a:t>calendar_tokens</a:t>
             </a:r>
             <a:endParaRPr lang="en-US" sz="1050" dirty="0"/>
           </a:p>
@@ -13717,7 +13917,7 @@
                 <a:ea typeface="Arial" pitchFamily="34" charset="-122"/>
                 <a:cs typeface="Arial" pitchFamily="34" charset="-120"/>
               </a:rPr>
-              <a:t>All 31 tables have RLS. 150+ SQL functions check roles before acting.</a:t>
+              <a:t>All 41 tables have RLS. 190+ SQL functions check roles before acting.</a:t>
             </a:r>
             <a:endParaRPr lang="en-US" sz="1300" dirty="0"/>
           </a:p>
@@ -15745,7 +15945,7 @@
                 <a:ea typeface="Arial" pitchFamily="34" charset="-122"/>
                 <a:cs typeface="Arial" pitchFamily="34" charset="-120"/>
               </a:rPr>
-              <a:t>45</a:t>
+              <a:t>52</a:t>
             </a:r>
             <a:endParaRPr lang="en-US" sz="4400" dirty="0"/>
           </a:p>
@@ -15823,7 +16023,7 @@
                 <a:ea typeface="Arial" pitchFamily="34" charset="-122"/>
                 <a:cs typeface="Arial" pitchFamily="34" charset="-120"/>
               </a:rPr>
-              <a:t>Member app, admin area and sign-in flows</a:t>
+              <a:t>Member app, admin and sign-in</a:t>
             </a:r>
             <a:endParaRPr lang="en-US" sz="1250" dirty="0"/>
           </a:p>
@@ -15896,7 +16096,7 @@
                 <a:ea typeface="Arial" pitchFamily="34" charset="-122"/>
                 <a:cs typeface="Arial" pitchFamily="34" charset="-120"/>
               </a:rPr>
-              <a:t>51</a:t>
+              <a:t>74</a:t>
             </a:r>
             <a:endParaRPr lang="en-US" sz="4400" dirty="0"/>
           </a:p>
@@ -16047,7 +16247,7 @@
                 <a:ea typeface="Arial" pitchFamily="34" charset="-122"/>
                 <a:cs typeface="Arial" pitchFamily="34" charset="-120"/>
               </a:rPr>
-              <a:t>19.4k</a:t>
+              <a:t>25.6k</a:t>
             </a:r>
             <a:endParaRPr lang="en-US" sz="4400" dirty="0"/>
           </a:p>
@@ -16125,7 +16325,7 @@
                 <a:ea typeface="Arial" pitchFamily="34" charset="-122"/>
                 <a:cs typeface="Arial" pitchFamily="34" charset="-120"/>
               </a:rPr>
-              <a:t>Across 140 source files</a:t>
+              <a:t>Across 194 source files, 43 unit tests</a:t>
             </a:r>
             <a:endParaRPr lang="en-US" sz="1250" dirty="0"/>
           </a:p>
@@ -16198,7 +16398,7 @@
                 <a:ea typeface="Arial" pitchFamily="34" charset="-122"/>
                 <a:cs typeface="Arial" pitchFamily="34" charset="-120"/>
               </a:rPr>
-              <a:t>4.6k</a:t>
+              <a:t>5.9k</a:t>
             </a:r>
             <a:endParaRPr lang="en-US" sz="4400" dirty="0"/>
           </a:p>
@@ -16276,7 +16476,7 @@
                 <a:ea typeface="Arial" pitchFamily="34" charset="-122"/>
                 <a:cs typeface="Arial" pitchFamily="34" charset="-120"/>
               </a:rPr>
-              <a:t>Schema plus 9 migrations</a:t>
+              <a:t>Schema plus 26 migrations</a:t>
             </a:r>
             <a:endParaRPr lang="en-US" sz="1250" dirty="0"/>
           </a:p>
@@ -16349,7 +16549,7 @@
                 <a:ea typeface="Arial" pitchFamily="34" charset="-122"/>
                 <a:cs typeface="Arial" pitchFamily="34" charset="-120"/>
               </a:rPr>
-              <a:t>31</a:t>
+              <a:t>41</a:t>
             </a:r>
             <a:endParaRPr lang="en-US" sz="4400" dirty="0"/>
           </a:p>
@@ -16500,7 +16700,7 @@
                 <a:ea typeface="Arial" pitchFamily="34" charset="-122"/>
                 <a:cs typeface="Arial" pitchFamily="34" charset="-120"/>
               </a:rPr>
-              <a:t>1,400+</a:t>
+              <a:t>1,700+</a:t>
             </a:r>
             <a:endParaRPr lang="en-US" sz="4400" dirty="0"/>
           </a:p>
@@ -16688,7 +16888,7 @@
                 <a:ea typeface="Arial" pitchFamily="34" charset="-122"/>
                 <a:cs typeface="Arial" pitchFamily="34" charset="-120"/>
               </a:rPr>
-              <a:t>Recent improvements, live now</a:t>
+              <a:t>Newest features</a:t>
             </a:r>
             <a:endParaRPr lang="en-US" sz="3400" dirty="0"/>
           </a:p>
@@ -16909,7 +17109,7 @@
                 <a:ea typeface="Arial" pitchFamily="34" charset="-122"/>
                 <a:cs typeface="Arial" pitchFamily="34" charset="-120"/>
               </a:rPr>
-              <a:t>Banners always fit</a:t>
+              <a:t>Waiting list &amp; alerts</a:t>
             </a:r>
             <a:endParaRPr lang="en-US" sz="1550" dirty="0"/>
           </a:p>
@@ -16948,7 +17148,7 @@
                 <a:ea typeface="Arial" pitchFamily="34" charset="-122"/>
                 <a:cs typeface="Arial" pitchFamily="34" charset="-120"/>
               </a:rPr>
-              <a:t>Event banners of any shape now show in full over a soft blurred background, instead of being cropped.</a:t>
+              <a:t>Full activities keep a waiting list that moves up by itself. Alerts for new activities in your hobbies and groups.</a:t>
             </a:r>
             <a:endParaRPr lang="en-US" sz="1200" dirty="0"/>
           </a:p>
@@ -17067,7 +17267,7 @@
                 <a:ea typeface="Arial" pitchFamily="34" charset="-122"/>
                 <a:cs typeface="Arial" pitchFamily="34" charset="-120"/>
               </a:rPr>
-              <a:t>Flyer generator</a:t>
+              <a:t>Check-in &amp; ratings</a:t>
             </a:r>
             <a:endParaRPr lang="en-US" sz="1550" dirty="0"/>
           </a:p>
@@ -17106,7 +17306,7 @@
                 <a:ea typeface="Arial" pitchFamily="34" charset="-122"/>
                 <a:cs typeface="Arial" pitchFamily="34" charset="-120"/>
               </a:rPr>
-              <a:t>Organizers and admins make a branded flyer in 9:16, 1:1 or 16:9, with QR code, and download PNG/JPG or share.</a:t>
+              <a:t>Organizers show a QR code at the venue; people who came rate the activity, which builds the organizer's score.</a:t>
             </a:r>
             <a:endParaRPr lang="en-US" sz="1200" dirty="0"/>
           </a:p>
@@ -17225,7 +17425,7 @@
                 <a:ea typeface="Arial" pitchFamily="34" charset="-122"/>
                 <a:cs typeface="Arial" pitchFamily="34" charset="-120"/>
               </a:rPr>
-              <a:t>Event creation fixed</a:t>
+              <a:t>Reminders &amp; push</a:t>
             </a:r>
             <a:endParaRPr lang="en-US" sz="1550" dirty="0"/>
           </a:p>
@@ -17264,7 +17464,7 @@
                 <a:ea typeface="Arial" pitchFamily="34" charset="-122"/>
                 <a:cs typeface="Arial" pitchFamily="34" charset="-120"/>
               </a:rPr>
-              <a:t>A database fix (migration 010) made event codes like COM-JAT-3962 generate reliably again.</a:t>
+              <a:t>A reminder the day before and a "How was it?" prompt after, by email and phone notification.</a:t>
             </a:r>
             <a:endParaRPr lang="en-US" sz="1200" dirty="0"/>
           </a:p>
@@ -17383,7 +17583,7 @@
                 <a:ea typeface="Arial" pitchFamily="34" charset="-122"/>
                 <a:cs typeface="Arial" pitchFamily="34" charset="-120"/>
               </a:rPr>
-              <a:t>Security upgrade</a:t>
+              <a:t>Organizer tools</a:t>
             </a:r>
             <a:endParaRPr lang="en-US" sz="1550" dirty="0"/>
           </a:p>
@@ -17422,7 +17622,7 @@
                 <a:ea typeface="Arial" pitchFamily="34" charset="-122"/>
                 <a:cs typeface="Arial" pitchFamily="34" charset="-120"/>
               </a:rPr>
-              <a:t>Next.js 16.3.6 with its security fixes, and code checks restored with 0 errors.</a:t>
+              <a:t>Duplicate, edit a weekly series at once, export to CSV, a big-screen QR, friends going and a calendar feed.</a:t>
             </a:r>
             <a:endParaRPr lang="en-US" sz="1200" dirty="0"/>
           </a:p>
@@ -18072,7 +18272,7 @@
                 <a:ea typeface="Arial" pitchFamily="34" charset="-122"/>
                 <a:cs typeface="Arial" pitchFamily="34" charset="-120"/>
               </a:rPr>
-              <a:t>Weekly and monthly admin emails need a scheduler and a server key.</a:t>
+              <a:t>The scheduler now runs reminders; weekly admin emails can build on it.</a:t>
             </a:r>
             <a:endParaRPr lang="en-US" sz="1250" dirty="0"/>
           </a:p>
@@ -18184,7 +18384,7 @@
                 <a:ea typeface="Arial" pitchFamily="34" charset="-122"/>
                 <a:cs typeface="Arial" pitchFamily="34" charset="-120"/>
               </a:rPr>
-              <a:t>Contact privacy</a:t>
+              <a:t>Payments</a:t>
             </a:r>
             <a:endParaRPr lang="en-US" sz="1600" dirty="0"/>
           </a:p>
@@ -18223,7 +18423,7 @@
                 <a:ea typeface="Arial" pitchFamily="34" charset="-122"/>
                 <a:cs typeface="Arial" pitchFamily="34" charset="-120"/>
               </a:rPr>
-              <a:t>Hide the organizer's WhatsApp at the database level, not only in the UI.</a:t>
+              <a:t>Paid activities are settled outside the app today; in-app payment comes later.</a:t>
             </a:r>
             <a:endParaRPr lang="en-US" sz="1250" dirty="0"/>
           </a:p>
@@ -18637,7 +18837,7 @@
                 <a:ea typeface="Arial" pitchFamily="34" charset="-122"/>
                 <a:cs typeface="Arial" pitchFamily="34" charset="-120"/>
               </a:rPr>
-              <a:t>Code tidy-up</a:t>
+              <a:t>Group chat &amp; photos</a:t>
             </a:r>
             <a:endParaRPr lang="en-US" sz="1600" dirty="0"/>
           </a:p>
@@ -18676,7 +18876,7 @@
                 <a:ea typeface="Arial" pitchFamily="34" charset="-122"/>
                 <a:cs typeface="Arial" pitchFamily="34" charset="-120"/>
               </a:rPr>
-              <a:t>Clear the 24 remaining lint warnings over time.</a:t>
+              <a:t>A chat per activity and shared photo albums after it.</a:t>
             </a:r>
             <a:endParaRPr lang="en-US" sz="1250" dirty="0"/>
           </a:p>
